--- a/dist/초3/수학/도형과측정/초3_수학_도형과측정_03_원의중심·반지름·지름_학생용.pptx
+++ b/dist/초3/수학/도형과측정/초3_수학_도형과측정_03_원의중심·반지름·지름_학생용.pptx
@@ -120,13 +120,13 @@
   <p:extLst>
     <p:ext uri="{521415D9-36F7-43E2-AB2F-B90AF26B5E84}">
       <p14:sectionLst xmlns:p14="http://schemas.microsoft.com/office/powerpoint/2010/main">
-        <p14:section name="도입" id="{83acc7f3-a520-32e9-2f5b-9416aaef04a7}">
+        <p14:section name="도입" id="{9baff38d-0ab0-c435-991c-36c27fd66b4f}">
           <p14:sldIdLst>
             <p14:sldId id="256"/>
             <p14:sldId id="257"/>
           </p14:sldIdLst>
         </p14:section>
-        <p14:section name="개념" id="{a1a1d045-7a62-9edd-b196-7886ff07690e}">
+        <p14:section name="개념" id="{30449fe3-8924-af00-a16a-8626de38f272}">
           <p14:sldIdLst>
             <p14:sldId id="258"/>
             <p14:sldId id="259"/>
@@ -135,31 +135,31 @@
             <p14:sldId id="264"/>
           </p14:sldIdLst>
         </p14:section>
-        <p14:section name="연습" id="{62d8b547-36ef-272a-ac82-f145d6ee7cad}">
+        <p14:section name="연습" id="{4be48d50-3197-c081-3887-c635afc236d6}">
           <p14:sldIdLst>
             <p14:sldId id="262"/>
             <p14:sldId id="263"/>
             <p14:sldId id="265"/>
           </p14:sldIdLst>
         </p14:section>
-        <p14:section name="개념" id="{bc9abbb2-82e7-432b-95e5-d55a062402d6}">
+        <p14:section name="개념" id="{3c1ab53c-17d5-be0c-e128-8255bfa13536}">
           <p14:sldIdLst/>
         </p14:section>
-        <p14:section name="연습" id="{353fd2b6-6458-6222-c4f8-8a1dbba48486}">
+        <p14:section name="연습" id="{f7870113-c1a0-4add-2e1e-c5914ce50fb2}">
           <p14:sldIdLst/>
         </p14:section>
-        <p14:section name="확인" id="{552f4e79-b99c-4ede-84e7-0a82b1308117}">
+        <p14:section name="확인" id="{766cc171-0987-0b5a-dc09-eaa5d0f2d4bd}">
           <p14:sldIdLst>
             <p14:sldId id="266"/>
             <p14:sldId id="267"/>
           </p14:sldIdLst>
         </p14:section>
-        <p14:section name="정리" id="{ade6b803-3291-94eb-5feb-4bcb2bcbc35e}">
+        <p14:section name="정리" id="{8a66c760-247e-ac93-ad56-a3d8a0b599f5}">
           <p14:sldIdLst>
             <p14:sldId id="268"/>
           </p14:sldIdLst>
         </p14:section>
-        <p14:section name="보충" id="{b51a3e0d-ca8f-875a-1d05-b95d75f4d9fc}">
+        <p14:section name="보충" id="{5c3e7ef7-4fa5-f677-507f-7fdc4acd1555}">
           <p14:sldIdLst>
             <p14:sldId id="269"/>
           </p14:sldIdLst>
@@ -2885,8 +2885,8 @@
         </p:nvSpPr>
         <p:spPr>
           <a:xfrm>
-            <a:off x="8671560" y="1127760"/>
-            <a:ext cx="1950720" cy="1950720"/>
+            <a:off x="8549640" y="1005840"/>
+            <a:ext cx="2194560" cy="2194560"/>
           </a:xfrm>
           <a:prstGeom prst="ellipse">
             <a:avLst/>
@@ -2908,8 +2908,8 @@
         </p:nvSpPr>
         <p:spPr>
           <a:xfrm flipV="1">
-            <a:off x="9646920" y="1615440"/>
-            <a:ext cx="844662" cy="487680"/>
+            <a:off x="9646920" y="1554480"/>
+            <a:ext cx="950244" cy="548640"/>
           </a:xfrm>
           <a:prstGeom prst="line">
             <a:avLst/>
@@ -2956,7 +2956,7 @@
         </p:nvSpPr>
         <p:spPr>
           <a:xfrm>
-            <a:off x="10432146" y="1556004"/>
+            <a:off x="10537728" y="1495044"/>
             <a:ext cx="118872" cy="118872"/>
           </a:xfrm>
           <a:prstGeom prst="ellipse">
@@ -2981,8 +2981,8 @@
         </p:nvSpPr>
         <p:spPr>
           <a:xfrm>
-            <a:off x="9442704" y="2156460"/>
-            <a:ext cx="408432" cy="381000"/>
+            <a:off x="9392920" y="2092960"/>
+            <a:ext cx="508000" cy="508000"/>
           </a:xfrm>
           <a:prstGeom prst="rect">
             <a:avLst/>
@@ -2998,7 +2998,7 @@
               <a:buNone/>
             </a:pPr>
             <a:r>
-              <a:rPr lang="ko-KR" altLang="en-US" sz="2400" b="1" dirty="0">
+              <a:rPr lang="ko-KR" altLang="en-US" sz="3200" b="1" dirty="0">
                 <a:solidFill>
                   <a:srgbClr val="1F2937"/>
                 </a:solidFill>
@@ -3008,7 +3008,7 @@
               </a:rPr>
               <a:t>ㅇ</a:t>
             </a:r>
-            <a:endParaRPr lang="ko-KR" sz="2400" dirty="0"/>
+            <a:endParaRPr lang="ko-KR" sz="3200" dirty="0"/>
           </a:p>
         </p:txBody>
       </p:sp>
@@ -3020,8 +3020,8 @@
         </p:nvSpPr>
         <p:spPr>
           <a:xfrm>
-            <a:off x="10498536" y="1303017"/>
-            <a:ext cx="408432" cy="381000"/>
+            <a:off x="10554335" y="1178557"/>
+            <a:ext cx="508000" cy="508000"/>
           </a:xfrm>
           <a:prstGeom prst="rect">
             <a:avLst/>
@@ -3037,7 +3037,7 @@
               <a:buNone/>
             </a:pPr>
             <a:r>
-              <a:rPr lang="ko-KR" altLang="en-US" sz="2400" b="1" dirty="0">
+              <a:rPr lang="ko-KR" altLang="en-US" sz="3200" b="1" dirty="0">
                 <a:solidFill>
                   <a:srgbClr val="1F2937"/>
                 </a:solidFill>
@@ -3047,7 +3047,7 @@
               </a:rPr>
               <a:t>ㄱ</a:t>
             </a:r>
-            <a:endParaRPr lang="ko-KR" sz="2400" dirty="0"/>
+            <a:endParaRPr lang="ko-KR" sz="3200" dirty="0"/>
           </a:p>
         </p:txBody>
       </p:sp>
@@ -3753,8 +3753,8 @@
         </p:nvSpPr>
         <p:spPr>
           <a:xfrm>
-            <a:off x="7343394" y="2499360"/>
-            <a:ext cx="3230880" cy="3230880"/>
+            <a:off x="7221474" y="2377440"/>
+            <a:ext cx="3474720" cy="3474720"/>
           </a:xfrm>
           <a:prstGeom prst="ellipse">
             <a:avLst/>
@@ -3777,7 +3777,7 @@
         <p:spPr>
           <a:xfrm>
             <a:off x="8958834" y="4114800"/>
-            <a:ext cx="1615440" cy="0"/>
+            <a:ext cx="1737360" cy="0"/>
           </a:xfrm>
           <a:prstGeom prst="line">
             <a:avLst/>
@@ -3799,7 +3799,7 @@
         </p:nvSpPr>
         <p:spPr>
           <a:xfrm>
-            <a:off x="9355074" y="3665220"/>
+            <a:off x="9416034" y="3649980"/>
             <a:ext cx="822960" cy="381000"/>
           </a:xfrm>
           <a:prstGeom prst="rect">
@@ -3863,7 +3863,7 @@
         </p:nvSpPr>
         <p:spPr>
           <a:xfrm>
-            <a:off x="10514838" y="4055364"/>
+            <a:off x="10636758" y="4055364"/>
             <a:ext cx="118872" cy="118872"/>
           </a:xfrm>
           <a:prstGeom prst="ellipse">
@@ -3888,8 +3888,8 @@
         </p:nvSpPr>
         <p:spPr>
           <a:xfrm>
-            <a:off x="8510778" y="3924300"/>
-            <a:ext cx="408432" cy="381000"/>
+            <a:off x="8460994" y="3860800"/>
+            <a:ext cx="508000" cy="508000"/>
           </a:xfrm>
           <a:prstGeom prst="rect">
             <a:avLst/>
@@ -3905,7 +3905,7 @@
               <a:buNone/>
             </a:pPr>
             <a:r>
-              <a:rPr lang="ko-KR" altLang="en-US" sz="2400" b="1" dirty="0">
+              <a:rPr lang="ko-KR" altLang="en-US" sz="3200" b="1" dirty="0">
                 <a:solidFill>
                   <a:srgbClr val="1F2937"/>
                 </a:solidFill>
@@ -3915,7 +3915,7 @@
               </a:rPr>
               <a:t>ㅇ</a:t>
             </a:r>
-            <a:endParaRPr lang="ko-KR" sz="2400" dirty="0"/>
+            <a:endParaRPr lang="ko-KR" sz="3200" dirty="0"/>
           </a:p>
         </p:txBody>
       </p:sp>
@@ -3927,8 +3927,8 @@
         </p:nvSpPr>
         <p:spPr>
           <a:xfrm>
-            <a:off x="10613898" y="3924300"/>
-            <a:ext cx="408432" cy="381000"/>
+            <a:off x="10686034" y="3860800"/>
+            <a:ext cx="508000" cy="508000"/>
           </a:xfrm>
           <a:prstGeom prst="rect">
             <a:avLst/>
@@ -3944,7 +3944,7 @@
               <a:buNone/>
             </a:pPr>
             <a:r>
-              <a:rPr lang="ko-KR" altLang="en-US" sz="2400" b="1" dirty="0">
+              <a:rPr lang="ko-KR" altLang="en-US" sz="3200" b="1" dirty="0">
                 <a:solidFill>
                   <a:srgbClr val="1F2937"/>
                 </a:solidFill>
@@ -3954,7 +3954,7 @@
               </a:rPr>
               <a:t>ㄱ</a:t>
             </a:r>
-            <a:endParaRPr lang="ko-KR" sz="2400" dirty="0"/>
+            <a:endParaRPr lang="ko-KR" sz="3200" dirty="0"/>
           </a:p>
         </p:txBody>
       </p:sp>
@@ -7472,8 +7472,8 @@
         </p:nvSpPr>
         <p:spPr>
           <a:xfrm>
-            <a:off x="2163318" y="2499360"/>
-            <a:ext cx="2133600" cy="2133600"/>
+            <a:off x="2041398" y="2377440"/>
+            <a:ext cx="2377440" cy="2377440"/>
           </a:xfrm>
           <a:prstGeom prst="ellipse">
             <a:avLst/>
@@ -7496,7 +7496,7 @@
         <p:spPr>
           <a:xfrm>
             <a:off x="3230118" y="3566160"/>
-            <a:ext cx="1066800" cy="0"/>
+            <a:ext cx="1188720" cy="0"/>
           </a:xfrm>
           <a:prstGeom prst="line">
             <a:avLst/>
@@ -7518,8 +7518,8 @@
         </p:nvSpPr>
         <p:spPr>
           <a:xfrm flipV="1">
-            <a:off x="3230118" y="2499360"/>
-            <a:ext cx="0" cy="1066800"/>
+            <a:off x="3230118" y="2377440"/>
+            <a:ext cx="0" cy="1188720"/>
           </a:xfrm>
           <a:prstGeom prst="line">
             <a:avLst/>
@@ -7541,8 +7541,8 @@
         </p:nvSpPr>
         <p:spPr>
           <a:xfrm flipH="1">
-            <a:off x="2306269" y="3566160"/>
-            <a:ext cx="923849" cy="533400"/>
+            <a:off x="2200686" y="3566160"/>
+            <a:ext cx="1029432" cy="594360"/>
           </a:xfrm>
           <a:prstGeom prst="line">
             <a:avLst/>
@@ -7589,7 +7589,7 @@
         </p:nvSpPr>
         <p:spPr>
           <a:xfrm>
-            <a:off x="4237482" y="3506724"/>
+            <a:off x="4359402" y="3506724"/>
             <a:ext cx="118872" cy="118872"/>
           </a:xfrm>
           <a:prstGeom prst="ellipse">
@@ -7614,7 +7614,7 @@
         </p:nvSpPr>
         <p:spPr>
           <a:xfrm>
-            <a:off x="3170682" y="2439924"/>
+            <a:off x="3170682" y="2318004"/>
             <a:ext cx="118872" cy="118872"/>
           </a:xfrm>
           <a:prstGeom prst="ellipse">
@@ -7639,7 +7639,7 @@
         </p:nvSpPr>
         <p:spPr>
           <a:xfrm>
-            <a:off x="2246833" y="4040124"/>
+            <a:off x="2141250" y="4101084"/>
             <a:ext cx="118872" cy="118872"/>
           </a:xfrm>
           <a:prstGeom prst="ellipse">
@@ -7664,8 +7664,8 @@
         </p:nvSpPr>
         <p:spPr>
           <a:xfrm>
-            <a:off x="3198323" y="3548081"/>
-            <a:ext cx="408432" cy="381000"/>
+            <a:off x="3148539" y="3484581"/>
+            <a:ext cx="508000" cy="508000"/>
           </a:xfrm>
           <a:prstGeom prst="rect">
             <a:avLst/>
@@ -7681,7 +7681,7 @@
               <a:buNone/>
             </a:pPr>
             <a:r>
-              <a:rPr lang="ko-KR" altLang="en-US" sz="2400" b="1" dirty="0">
+              <a:rPr lang="ko-KR" altLang="en-US" sz="3200" b="1" dirty="0">
                 <a:solidFill>
                   <a:srgbClr val="1F2937"/>
                 </a:solidFill>
@@ -7691,7 +7691,7 @@
               </a:rPr>
               <a:t>ㅇ</a:t>
             </a:r>
-            <a:endParaRPr lang="ko-KR" sz="2400" dirty="0"/>
+            <a:endParaRPr lang="ko-KR" sz="3200" dirty="0"/>
           </a:p>
         </p:txBody>
       </p:sp>
@@ -7703,8 +7703,8 @@
         </p:nvSpPr>
         <p:spPr>
           <a:xfrm>
-            <a:off x="4336542" y="3375660"/>
-            <a:ext cx="408432" cy="381000"/>
+            <a:off x="4408678" y="3312160"/>
+            <a:ext cx="508000" cy="508000"/>
           </a:xfrm>
           <a:prstGeom prst="rect">
             <a:avLst/>
@@ -7720,7 +7720,7 @@
               <a:buNone/>
             </a:pPr>
             <a:r>
-              <a:rPr lang="ko-KR" altLang="en-US" sz="2400" b="1" dirty="0">
+              <a:rPr lang="ko-KR" altLang="en-US" sz="3200" b="1" dirty="0">
                 <a:solidFill>
                   <a:srgbClr val="1F2937"/>
                 </a:solidFill>
@@ -7730,7 +7730,7 @@
               </a:rPr>
               <a:t>ㄱ</a:t>
             </a:r>
-            <a:endParaRPr lang="ko-KR" sz="2400" dirty="0"/>
+            <a:endParaRPr lang="ko-KR" sz="3200" dirty="0"/>
           </a:p>
         </p:txBody>
       </p:sp>
@@ -7742,8 +7742,8 @@
         </p:nvSpPr>
         <p:spPr>
           <a:xfrm>
-            <a:off x="3025902" y="2065020"/>
-            <a:ext cx="408432" cy="381000"/>
+            <a:off x="2976118" y="1879600"/>
+            <a:ext cx="508000" cy="508000"/>
           </a:xfrm>
           <a:prstGeom prst="rect">
             <a:avLst/>
@@ -7759,7 +7759,7 @@
               <a:buNone/>
             </a:pPr>
             <a:r>
-              <a:rPr lang="ko-KR" altLang="en-US" sz="2400" b="1" dirty="0">
+              <a:rPr lang="ko-KR" altLang="en-US" sz="3200" b="1" dirty="0">
                 <a:solidFill>
                   <a:srgbClr val="1F2937"/>
                 </a:solidFill>
@@ -7769,7 +7769,7 @@
               </a:rPr>
               <a:t>ㄴ</a:t>
             </a:r>
-            <a:endParaRPr lang="ko-KR" sz="2400" dirty="0"/>
+            <a:endParaRPr lang="ko-KR" sz="3200" dirty="0"/>
           </a:p>
         </p:txBody>
       </p:sp>
@@ -7781,8 +7781,8 @@
         </p:nvSpPr>
         <p:spPr>
           <a:xfrm>
-            <a:off x="1890883" y="4030983"/>
-            <a:ext cx="408432" cy="381000"/>
+            <a:off x="1735516" y="4028443"/>
+            <a:ext cx="508000" cy="508000"/>
           </a:xfrm>
           <a:prstGeom prst="rect">
             <a:avLst/>
@@ -7798,7 +7798,7 @@
               <a:buNone/>
             </a:pPr>
             <a:r>
-              <a:rPr lang="ko-KR" altLang="en-US" sz="2400" b="1" dirty="0">
+              <a:rPr lang="ko-KR" altLang="en-US" sz="3200" b="1" dirty="0">
                 <a:solidFill>
                   <a:srgbClr val="1F2937"/>
                 </a:solidFill>
@@ -7808,7 +7808,7 @@
               </a:rPr>
               <a:t>ㄷ</a:t>
             </a:r>
-            <a:endParaRPr lang="ko-KR" sz="2400" dirty="0"/>
+            <a:endParaRPr lang="ko-KR" sz="3200" dirty="0"/>
           </a:p>
         </p:txBody>
       </p:sp>
@@ -8220,8 +8220,8 @@
         </p:nvSpPr>
         <p:spPr>
           <a:xfrm>
-            <a:off x="2163318" y="2499360"/>
-            <a:ext cx="2133600" cy="2133600"/>
+            <a:off x="2041398" y="2377440"/>
+            <a:ext cx="2377440" cy="2377440"/>
           </a:xfrm>
           <a:prstGeom prst="ellipse">
             <a:avLst/>
@@ -8243,8 +8243,8 @@
         </p:nvSpPr>
         <p:spPr>
           <a:xfrm>
-            <a:off x="2163318" y="3566160"/>
-            <a:ext cx="2133600" cy="0"/>
+            <a:off x="2041398" y="3566160"/>
+            <a:ext cx="2377440" cy="0"/>
           </a:xfrm>
           <a:prstGeom prst="line">
             <a:avLst/>
@@ -8266,8 +8266,8 @@
         </p:nvSpPr>
         <p:spPr>
           <a:xfrm>
-            <a:off x="2376678" y="2926080"/>
-            <a:ext cx="1706880" cy="0"/>
+            <a:off x="2279142" y="2852928"/>
+            <a:ext cx="1901952" cy="0"/>
           </a:xfrm>
           <a:prstGeom prst="line">
             <a:avLst/>
@@ -8314,7 +8314,7 @@
         </p:nvSpPr>
         <p:spPr>
           <a:xfrm>
-            <a:off x="2103882" y="3506724"/>
+            <a:off x="1981962" y="3506724"/>
             <a:ext cx="118872" cy="118872"/>
           </a:xfrm>
           <a:prstGeom prst="ellipse">
@@ -8339,7 +8339,7 @@
         </p:nvSpPr>
         <p:spPr>
           <a:xfrm>
-            <a:off x="4237482" y="3506724"/>
+            <a:off x="4359402" y="3506724"/>
             <a:ext cx="118872" cy="118872"/>
           </a:xfrm>
           <a:prstGeom prst="ellipse">
@@ -8364,7 +8364,7 @@
         </p:nvSpPr>
         <p:spPr>
           <a:xfrm>
-            <a:off x="2317242" y="2866644"/>
+            <a:off x="2219706" y="2793492"/>
             <a:ext cx="118872" cy="118872"/>
           </a:xfrm>
           <a:prstGeom prst="ellipse">
@@ -8389,7 +8389,7 @@
         </p:nvSpPr>
         <p:spPr>
           <a:xfrm>
-            <a:off x="4024122" y="2866644"/>
+            <a:off x="4121658" y="2793492"/>
             <a:ext cx="118872" cy="118872"/>
           </a:xfrm>
           <a:prstGeom prst="ellipse">
@@ -8414,8 +8414,8 @@
         </p:nvSpPr>
         <p:spPr>
           <a:xfrm>
-            <a:off x="3025902" y="3619500"/>
-            <a:ext cx="408432" cy="381000"/>
+            <a:off x="2976118" y="3556000"/>
+            <a:ext cx="508000" cy="508000"/>
           </a:xfrm>
           <a:prstGeom prst="rect">
             <a:avLst/>
@@ -8431,7 +8431,7 @@
               <a:buNone/>
             </a:pPr>
             <a:r>
-              <a:rPr lang="ko-KR" altLang="en-US" sz="2400" b="1" dirty="0">
+              <a:rPr lang="ko-KR" altLang="en-US" sz="3200" b="1" dirty="0">
                 <a:solidFill>
                   <a:srgbClr val="1F2937"/>
                 </a:solidFill>
@@ -8441,7 +8441,7 @@
               </a:rPr>
               <a:t>ㅇ</a:t>
             </a:r>
-            <a:endParaRPr lang="ko-KR" sz="2400" dirty="0"/>
+            <a:endParaRPr lang="ko-KR" sz="3200" dirty="0"/>
           </a:p>
         </p:txBody>
       </p:sp>
@@ -8453,8 +8453,8 @@
         </p:nvSpPr>
         <p:spPr>
           <a:xfrm>
-            <a:off x="1715262" y="3375660"/>
-            <a:ext cx="408432" cy="381000"/>
+            <a:off x="1543558" y="3312160"/>
+            <a:ext cx="508000" cy="508000"/>
           </a:xfrm>
           <a:prstGeom prst="rect">
             <a:avLst/>
@@ -8470,7 +8470,7 @@
               <a:buNone/>
             </a:pPr>
             <a:r>
-              <a:rPr lang="ko-KR" altLang="en-US" sz="2400" b="1" dirty="0">
+              <a:rPr lang="ko-KR" altLang="en-US" sz="3200" b="1" dirty="0">
                 <a:solidFill>
                   <a:srgbClr val="1F2937"/>
                 </a:solidFill>
@@ -8480,7 +8480,7 @@
               </a:rPr>
               <a:t>ㄱ</a:t>
             </a:r>
-            <a:endParaRPr lang="ko-KR" sz="2400" dirty="0"/>
+            <a:endParaRPr lang="ko-KR" sz="3200" dirty="0"/>
           </a:p>
         </p:txBody>
       </p:sp>
@@ -8492,8 +8492,8 @@
         </p:nvSpPr>
         <p:spPr>
           <a:xfrm>
-            <a:off x="4336542" y="3375660"/>
-            <a:ext cx="408432" cy="381000"/>
+            <a:off x="4408678" y="3312160"/>
+            <a:ext cx="508000" cy="508000"/>
           </a:xfrm>
           <a:prstGeom prst="rect">
             <a:avLst/>
@@ -8509,7 +8509,7 @@
               <a:buNone/>
             </a:pPr>
             <a:r>
-              <a:rPr lang="ko-KR" altLang="en-US" sz="2400" b="1" dirty="0">
+              <a:rPr lang="ko-KR" altLang="en-US" sz="3200" b="1" dirty="0">
                 <a:solidFill>
                   <a:srgbClr val="1F2937"/>
                 </a:solidFill>
@@ -8519,7 +8519,7 @@
               </a:rPr>
               <a:t>ㄴ</a:t>
             </a:r>
-            <a:endParaRPr lang="ko-KR" sz="2400" dirty="0"/>
+            <a:endParaRPr lang="ko-KR" sz="3200" dirty="0"/>
           </a:p>
         </p:txBody>
       </p:sp>
@@ -8531,8 +8531,8 @@
         </p:nvSpPr>
         <p:spPr>
           <a:xfrm>
-            <a:off x="1928622" y="2735580"/>
-            <a:ext cx="408432" cy="381000"/>
+            <a:off x="1781302" y="2598928"/>
+            <a:ext cx="508000" cy="508000"/>
           </a:xfrm>
           <a:prstGeom prst="rect">
             <a:avLst/>
@@ -8548,7 +8548,7 @@
               <a:buNone/>
             </a:pPr>
             <a:r>
-              <a:rPr lang="ko-KR" altLang="en-US" sz="2400" b="1" dirty="0">
+              <a:rPr lang="ko-KR" altLang="en-US" sz="3200" b="1" dirty="0">
                 <a:solidFill>
                   <a:srgbClr val="1F2937"/>
                 </a:solidFill>
@@ -8558,7 +8558,7 @@
               </a:rPr>
               <a:t>ㄷ</a:t>
             </a:r>
-            <a:endParaRPr lang="ko-KR" sz="2400" dirty="0"/>
+            <a:endParaRPr lang="ko-KR" sz="3200" dirty="0"/>
           </a:p>
         </p:txBody>
       </p:sp>
@@ -8570,8 +8570,8 @@
         </p:nvSpPr>
         <p:spPr>
           <a:xfrm>
-            <a:off x="4123182" y="2735580"/>
-            <a:ext cx="408432" cy="381000"/>
+            <a:off x="4170934" y="2598928"/>
+            <a:ext cx="508000" cy="508000"/>
           </a:xfrm>
           <a:prstGeom prst="rect">
             <a:avLst/>
@@ -8587,7 +8587,7 @@
               <a:buNone/>
             </a:pPr>
             <a:r>
-              <a:rPr lang="ko-KR" altLang="en-US" sz="2400" b="1" dirty="0">
+              <a:rPr lang="ko-KR" altLang="en-US" sz="3200" b="1" dirty="0">
                 <a:solidFill>
                   <a:srgbClr val="1F2937"/>
                 </a:solidFill>
@@ -8597,7 +8597,7 @@
               </a:rPr>
               <a:t>ㄹ</a:t>
             </a:r>
-            <a:endParaRPr lang="ko-KR" sz="2400" dirty="0"/>
+            <a:endParaRPr lang="ko-KR" sz="3200" dirty="0"/>
           </a:p>
         </p:txBody>
       </p:sp>
@@ -8940,8 +8940,8 @@
         </p:nvSpPr>
         <p:spPr>
           <a:xfrm>
-            <a:off x="1614678" y="2499360"/>
-            <a:ext cx="3230880" cy="3230880"/>
+            <a:off x="1492758" y="2377440"/>
+            <a:ext cx="3474720" cy="3474720"/>
           </a:xfrm>
           <a:prstGeom prst="ellipse">
             <a:avLst/>
@@ -8963,8 +8963,8 @@
         </p:nvSpPr>
         <p:spPr>
           <a:xfrm>
-            <a:off x="1614678" y="4114800"/>
-            <a:ext cx="3230880" cy="0"/>
+            <a:off x="1492758" y="4114800"/>
+            <a:ext cx="3474720" cy="0"/>
           </a:xfrm>
           <a:prstGeom prst="line">
             <a:avLst/>
@@ -8986,8 +8986,8 @@
         </p:nvSpPr>
         <p:spPr>
           <a:xfrm flipV="1">
-            <a:off x="3230118" y="2499360"/>
-            <a:ext cx="0" cy="1615440"/>
+            <a:off x="3230118" y="2377440"/>
+            <a:ext cx="0" cy="1737360"/>
           </a:xfrm>
           <a:prstGeom prst="line">
             <a:avLst/>
@@ -9009,7 +9009,7 @@
         </p:nvSpPr>
         <p:spPr>
           <a:xfrm>
-            <a:off x="2818638" y="4183380"/>
+            <a:off x="2818638" y="4198620"/>
             <a:ext cx="822960" cy="381000"/>
           </a:xfrm>
           <a:prstGeom prst="rect">
@@ -9048,7 +9048,7 @@
         </p:nvSpPr>
         <p:spPr>
           <a:xfrm>
-            <a:off x="2254758" y="3116580"/>
+            <a:off x="2398014" y="3055620"/>
             <a:ext cx="822960" cy="381000"/>
           </a:xfrm>
           <a:prstGeom prst="rect">
@@ -9112,7 +9112,7 @@
         </p:nvSpPr>
         <p:spPr>
           <a:xfrm>
-            <a:off x="1555242" y="4055364"/>
+            <a:off x="1433322" y="4055364"/>
             <a:ext cx="118872" cy="118872"/>
           </a:xfrm>
           <a:prstGeom prst="ellipse">
@@ -9137,7 +9137,7 @@
         </p:nvSpPr>
         <p:spPr>
           <a:xfrm>
-            <a:off x="4786122" y="4055364"/>
+            <a:off x="4908042" y="4055364"/>
             <a:ext cx="118872" cy="118872"/>
           </a:xfrm>
           <a:prstGeom prst="ellipse">
@@ -9162,7 +9162,7 @@
         </p:nvSpPr>
         <p:spPr>
           <a:xfrm>
-            <a:off x="3170682" y="2439924"/>
+            <a:off x="3170682" y="2318004"/>
             <a:ext cx="118872" cy="118872"/>
           </a:xfrm>
           <a:prstGeom prst="ellipse">
@@ -9187,8 +9187,8 @@
         </p:nvSpPr>
         <p:spPr>
           <a:xfrm>
-            <a:off x="2853481" y="3751879"/>
-            <a:ext cx="408432" cy="381000"/>
+            <a:off x="2803697" y="3688379"/>
+            <a:ext cx="508000" cy="508000"/>
           </a:xfrm>
           <a:prstGeom prst="rect">
             <a:avLst/>
@@ -9204,7 +9204,7 @@
               <a:buNone/>
             </a:pPr>
             <a:r>
-              <a:rPr lang="ko-KR" altLang="en-US" sz="2400" b="1" dirty="0">
+              <a:rPr lang="ko-KR" altLang="en-US" sz="3200" b="1" dirty="0">
                 <a:solidFill>
                   <a:srgbClr val="1F2937"/>
                 </a:solidFill>
@@ -9214,7 +9214,7 @@
               </a:rPr>
               <a:t>ㅇ</a:t>
             </a:r>
-            <a:endParaRPr lang="ko-KR" sz="2400" dirty="0"/>
+            <a:endParaRPr lang="ko-KR" sz="3200" dirty="0"/>
           </a:p>
         </p:txBody>
       </p:sp>
@@ -9226,8 +9226,8 @@
         </p:nvSpPr>
         <p:spPr>
           <a:xfrm>
-            <a:off x="1166622" y="3924300"/>
-            <a:ext cx="408432" cy="381000"/>
+            <a:off x="994918" y="3860800"/>
+            <a:ext cx="508000" cy="508000"/>
           </a:xfrm>
           <a:prstGeom prst="rect">
             <a:avLst/>
@@ -9243,7 +9243,7 @@
               <a:buNone/>
             </a:pPr>
             <a:r>
-              <a:rPr lang="ko-KR" altLang="en-US" sz="2400" b="1" dirty="0">
+              <a:rPr lang="ko-KR" altLang="en-US" sz="3200" b="1" dirty="0">
                 <a:solidFill>
                   <a:srgbClr val="1F2937"/>
                 </a:solidFill>
@@ -9253,7 +9253,7 @@
               </a:rPr>
               <a:t>ㄱ</a:t>
             </a:r>
-            <a:endParaRPr lang="ko-KR" sz="2400" dirty="0"/>
+            <a:endParaRPr lang="ko-KR" sz="3200" dirty="0"/>
           </a:p>
         </p:txBody>
       </p:sp>
@@ -9265,8 +9265,8 @@
         </p:nvSpPr>
         <p:spPr>
           <a:xfrm>
-            <a:off x="4885182" y="3924300"/>
-            <a:ext cx="408432" cy="381000"/>
+            <a:off x="4957318" y="3860800"/>
+            <a:ext cx="508000" cy="508000"/>
           </a:xfrm>
           <a:prstGeom prst="rect">
             <a:avLst/>
@@ -9282,7 +9282,7 @@
               <a:buNone/>
             </a:pPr>
             <a:r>
-              <a:rPr lang="ko-KR" altLang="en-US" sz="2400" b="1" dirty="0">
+              <a:rPr lang="ko-KR" altLang="en-US" sz="3200" b="1" dirty="0">
                 <a:solidFill>
                   <a:srgbClr val="1F2937"/>
                 </a:solidFill>
@@ -9292,7 +9292,7 @@
               </a:rPr>
               <a:t>ㄴ</a:t>
             </a:r>
-            <a:endParaRPr lang="ko-KR" sz="2400" dirty="0"/>
+            <a:endParaRPr lang="ko-KR" sz="3200" dirty="0"/>
           </a:p>
         </p:txBody>
       </p:sp>
@@ -9304,8 +9304,8 @@
         </p:nvSpPr>
         <p:spPr>
           <a:xfrm>
-            <a:off x="3025902" y="2065020"/>
-            <a:ext cx="408432" cy="381000"/>
+            <a:off x="2976118" y="1879600"/>
+            <a:ext cx="508000" cy="508000"/>
           </a:xfrm>
           <a:prstGeom prst="rect">
             <a:avLst/>
@@ -9321,7 +9321,7 @@
               <a:buNone/>
             </a:pPr>
             <a:r>
-              <a:rPr lang="ko-KR" altLang="en-US" sz="2400" b="1" dirty="0">
+              <a:rPr lang="ko-KR" altLang="en-US" sz="3200" b="1" dirty="0">
                 <a:solidFill>
                   <a:srgbClr val="1F2937"/>
                 </a:solidFill>
@@ -9331,7 +9331,7 @@
               </a:rPr>
               <a:t>ㄷ</a:t>
             </a:r>
-            <a:endParaRPr lang="ko-KR" sz="2400" dirty="0"/>
+            <a:endParaRPr lang="ko-KR" sz="3200" dirty="0"/>
           </a:p>
         </p:txBody>
       </p:sp>
@@ -9743,8 +9743,8 @@
         </p:nvSpPr>
         <p:spPr>
           <a:xfrm>
-            <a:off x="7892034" y="2499360"/>
-            <a:ext cx="2133600" cy="2133600"/>
+            <a:off x="7770114" y="2377440"/>
+            <a:ext cx="2377440" cy="2377440"/>
           </a:xfrm>
           <a:prstGeom prst="ellipse">
             <a:avLst/>
@@ -9766,8 +9766,8 @@
         </p:nvSpPr>
         <p:spPr>
           <a:xfrm>
-            <a:off x="7892034" y="3566160"/>
-            <a:ext cx="2133600" cy="0"/>
+            <a:off x="7770114" y="3566160"/>
+            <a:ext cx="2377440" cy="0"/>
           </a:xfrm>
           <a:prstGeom prst="line">
             <a:avLst/>
@@ -9789,7 +9789,7 @@
         </p:nvSpPr>
         <p:spPr>
           <a:xfrm>
-            <a:off x="8446770" y="3634740"/>
+            <a:off x="8446770" y="3649980"/>
             <a:ext cx="1024128" cy="381000"/>
           </a:xfrm>
           <a:prstGeom prst="rect">
@@ -9853,7 +9853,7 @@
         </p:nvSpPr>
         <p:spPr>
           <a:xfrm>
-            <a:off x="7832598" y="3506724"/>
+            <a:off x="7710678" y="3506724"/>
             <a:ext cx="118872" cy="118872"/>
           </a:xfrm>
           <a:prstGeom prst="ellipse">
@@ -9878,7 +9878,7 @@
         </p:nvSpPr>
         <p:spPr>
           <a:xfrm>
-            <a:off x="9966198" y="3506724"/>
+            <a:off x="10088118" y="3506724"/>
             <a:ext cx="118872" cy="118872"/>
           </a:xfrm>
           <a:prstGeom prst="ellipse">
@@ -9903,8 +9903,8 @@
         </p:nvSpPr>
         <p:spPr>
           <a:xfrm>
-            <a:off x="8754618" y="3131820"/>
-            <a:ext cx="408432" cy="381000"/>
+            <a:off x="8704834" y="3068320"/>
+            <a:ext cx="508000" cy="508000"/>
           </a:xfrm>
           <a:prstGeom prst="rect">
             <a:avLst/>
@@ -9920,7 +9920,7 @@
               <a:buNone/>
             </a:pPr>
             <a:r>
-              <a:rPr lang="ko-KR" altLang="en-US" sz="2400" b="1" dirty="0">
+              <a:rPr lang="ko-KR" altLang="en-US" sz="3200" b="1" dirty="0">
                 <a:solidFill>
                   <a:srgbClr val="1F2937"/>
                 </a:solidFill>
@@ -9930,7 +9930,7 @@
               </a:rPr>
               <a:t>ㅇ</a:t>
             </a:r>
-            <a:endParaRPr lang="ko-KR" sz="2400" dirty="0"/>
+            <a:endParaRPr lang="ko-KR" sz="3200" dirty="0"/>
           </a:p>
         </p:txBody>
       </p:sp>
